--- a/docs/IMPIX_AI_플랫폼_소개서.pptx
+++ b/docs/IMPIX_AI_플랫폼_소개서.pptx
@@ -6210,7 +6210,7 @@
         <p:spPr>
           <a:xfrm>
             <a:off x="566928" y="1481328"/>
-            <a:ext cx="7680960" cy="1371600"/>
+            <a:ext cx="10241280" cy="1371600"/>
           </a:xfrm>
           <a:prstGeom prst="rect">
             <a:avLst/>
@@ -7982,11 +7982,11 @@
         <p:spPr>
           <a:xfrm>
             <a:off x="566928" y="1965960"/>
-            <a:ext cx="11057839" cy="1170432"/>
+            <a:ext cx="11057839" cy="1115568"/>
           </a:xfrm>
           <a:prstGeom prst="roundRect">
             <a:avLst>
-              <a:gd name="adj" fmla="val 4688"/>
+              <a:gd name="adj" fmla="val 4918"/>
             </a:avLst>
           </a:prstGeom>
           <a:solidFill>
@@ -8160,12 +8160,12 @@
         </p:nvSpPr>
         <p:spPr>
           <a:xfrm>
-            <a:off x="566928" y="3374136"/>
-            <a:ext cx="11057839" cy="1170432"/>
+            <a:off x="566928" y="3300984"/>
+            <a:ext cx="11057839" cy="1115568"/>
           </a:xfrm>
           <a:prstGeom prst="roundRect">
             <a:avLst>
-              <a:gd name="adj" fmla="val 4688"/>
+              <a:gd name="adj" fmla="val 4918"/>
             </a:avLst>
           </a:prstGeom>
           <a:solidFill>
@@ -8194,7 +8194,7 @@
         </p:nvSpPr>
         <p:spPr>
           <a:xfrm>
-            <a:off x="950976" y="3758184"/>
+            <a:off x="950976" y="3685032"/>
             <a:ext cx="402336" cy="402336"/>
           </a:xfrm>
           <a:prstGeom prst="ellipse">
@@ -8219,7 +8219,7 @@
         </p:nvSpPr>
         <p:spPr>
           <a:xfrm>
-            <a:off x="950976" y="3758184"/>
+            <a:off x="950976" y="3685032"/>
             <a:ext cx="402336" cy="402336"/>
           </a:xfrm>
           <a:prstGeom prst="rect">
@@ -8258,7 +8258,7 @@
         </p:nvSpPr>
         <p:spPr>
           <a:xfrm>
-            <a:off x="1572768" y="3611880"/>
+            <a:off x="1572768" y="3538728"/>
             <a:ext cx="2194560" cy="365760"/>
           </a:xfrm>
           <a:prstGeom prst="rect">
@@ -8297,7 +8297,7 @@
         </p:nvSpPr>
         <p:spPr>
           <a:xfrm>
-            <a:off x="1572768" y="3977640"/>
+            <a:off x="1572768" y="3904488"/>
             <a:ext cx="9503359" cy="475488"/>
           </a:xfrm>
           <a:prstGeom prst="rect">
@@ -8339,12 +8339,12 @@
         </p:nvSpPr>
         <p:spPr>
           <a:xfrm>
-            <a:off x="566928" y="4782312"/>
-            <a:ext cx="11057839" cy="1170432"/>
+            <a:off x="566928" y="4636008"/>
+            <a:ext cx="11057839" cy="1115568"/>
           </a:xfrm>
           <a:prstGeom prst="roundRect">
             <a:avLst>
-              <a:gd name="adj" fmla="val 4688"/>
+              <a:gd name="adj" fmla="val 4918"/>
             </a:avLst>
           </a:prstGeom>
           <a:solidFill>
@@ -8373,7 +8373,7 @@
         </p:nvSpPr>
         <p:spPr>
           <a:xfrm>
-            <a:off x="950976" y="5166360"/>
+            <a:off x="950976" y="5020056"/>
             <a:ext cx="402336" cy="402336"/>
           </a:xfrm>
           <a:prstGeom prst="ellipse">
@@ -8398,7 +8398,7 @@
         </p:nvSpPr>
         <p:spPr>
           <a:xfrm>
-            <a:off x="950976" y="5166360"/>
+            <a:off x="950976" y="5020056"/>
             <a:ext cx="402336" cy="402336"/>
           </a:xfrm>
           <a:prstGeom prst="rect">
@@ -8437,7 +8437,7 @@
         </p:nvSpPr>
         <p:spPr>
           <a:xfrm>
-            <a:off x="1572768" y="5020056"/>
+            <a:off x="1572768" y="4873752"/>
             <a:ext cx="2194560" cy="365760"/>
           </a:xfrm>
           <a:prstGeom prst="rect">
@@ -8476,7 +8476,7 @@
         </p:nvSpPr>
         <p:spPr>
           <a:xfrm>
-            <a:off x="1572768" y="5385816"/>
+            <a:off x="1572768" y="5239512"/>
             <a:ext cx="9503359" cy="475488"/>
           </a:xfrm>
           <a:prstGeom prst="rect">
@@ -8518,7 +8518,7 @@
         </p:nvSpPr>
         <p:spPr>
           <a:xfrm>
-            <a:off x="566928" y="5806440"/>
+            <a:off x="566928" y="5897880"/>
             <a:ext cx="11057839" cy="329184"/>
           </a:xfrm>
           <a:prstGeom prst="rect">
@@ -10492,7 +10492,7 @@
         <p:spPr>
           <a:xfrm>
             <a:off x="804672" y="3127248"/>
-            <a:ext cx="1428841" cy="603504"/>
+            <a:ext cx="1428841" cy="713232"/>
           </a:xfrm>
           <a:prstGeom prst="rect">
             <a:avLst/>
@@ -10730,7 +10730,7 @@
         <p:spPr>
           <a:xfrm>
             <a:off x="3093049" y="3127248"/>
-            <a:ext cx="1428841" cy="603504"/>
+            <a:ext cx="1428841" cy="713232"/>
           </a:xfrm>
           <a:prstGeom prst="rect">
             <a:avLst/>
@@ -10968,7 +10968,7 @@
         <p:spPr>
           <a:xfrm>
             <a:off x="5381427" y="3127248"/>
-            <a:ext cx="1428841" cy="603504"/>
+            <a:ext cx="1428841" cy="713232"/>
           </a:xfrm>
           <a:prstGeom prst="rect">
             <a:avLst/>
@@ -11206,7 +11206,7 @@
         <p:spPr>
           <a:xfrm>
             <a:off x="7669804" y="3127248"/>
-            <a:ext cx="1428841" cy="603504"/>
+            <a:ext cx="1428841" cy="713232"/>
           </a:xfrm>
           <a:prstGeom prst="rect">
             <a:avLst/>
@@ -11444,7 +11444,7 @@
         <p:spPr>
           <a:xfrm>
             <a:off x="9958182" y="3127248"/>
-            <a:ext cx="1428841" cy="603504"/>
+            <a:ext cx="1428841" cy="713232"/>
           </a:xfrm>
           <a:prstGeom prst="rect">
             <a:avLst/>
